--- a/chandra_kanta_slides.pptx
+++ b/chandra_kanta_slides.pptx
@@ -338,6 +338,9 @@
   <p:clrMapOvr>
     <a:masterClrMapping/>
   </p:clrMapOvr>
+  <p:transition spd="slow">
+    <p:fade/>
+  </p:transition>
 </p:sldLayout>
 </file>
 
@@ -538,6 +541,9 @@
   <p:clrMapOvr>
     <a:masterClrMapping/>
   </p:clrMapOvr>
+  <p:transition spd="slow">
+    <p:fade/>
+  </p:transition>
 </p:sldLayout>
 </file>
 
@@ -748,6 +754,9 @@
   <p:clrMapOvr>
     <a:masterClrMapping/>
   </p:clrMapOvr>
+  <p:transition spd="slow">
+    <p:fade/>
+  </p:transition>
 </p:sldLayout>
 </file>
 
@@ -948,6 +957,9 @@
   <p:clrMapOvr>
     <a:masterClrMapping/>
   </p:clrMapOvr>
+  <p:transition spd="slow">
+    <p:fade/>
+  </p:transition>
 </p:sldLayout>
 </file>
 
@@ -1224,6 +1236,9 @@
   <p:clrMapOvr>
     <a:masterClrMapping/>
   </p:clrMapOvr>
+  <p:transition spd="slow">
+    <p:fade/>
+  </p:transition>
 </p:sldLayout>
 </file>
 
@@ -1492,6 +1507,9 @@
   <p:clrMapOvr>
     <a:masterClrMapping/>
   </p:clrMapOvr>
+  <p:transition spd="slow">
+    <p:fade/>
+  </p:transition>
 </p:sldLayout>
 </file>
 
@@ -1907,6 +1925,9 @@
   <p:clrMapOvr>
     <a:masterClrMapping/>
   </p:clrMapOvr>
+  <p:transition spd="slow">
+    <p:fade/>
+  </p:transition>
 </p:sldLayout>
 </file>
 
@@ -2049,6 +2070,9 @@
   <p:clrMapOvr>
     <a:masterClrMapping/>
   </p:clrMapOvr>
+  <p:transition spd="slow">
+    <p:fade/>
+  </p:transition>
 </p:sldLayout>
 </file>
 
@@ -2162,6 +2186,9 @@
   <p:clrMapOvr>
     <a:masterClrMapping/>
   </p:clrMapOvr>
+  <p:transition spd="slow">
+    <p:fade/>
+  </p:transition>
 </p:sldLayout>
 </file>
 
@@ -2475,6 +2502,9 @@
   <p:clrMapOvr>
     <a:masterClrMapping/>
   </p:clrMapOvr>
+  <p:transition spd="slow">
+    <p:fade/>
+  </p:transition>
 </p:sldLayout>
 </file>
 
@@ -2764,6 +2794,9 @@
   <p:clrMapOvr>
     <a:masterClrMapping/>
   </p:clrMapOvr>
+  <p:transition spd="slow">
+    <p:fade/>
+  </p:transition>
 </p:sldLayout>
 </file>
 
@@ -3054,6 +3087,9 @@
     <p:sldLayoutId id="2147483658" r:id="rId10"/>
     <p:sldLayoutId id="2147483659" r:id="rId11"/>
   </p:sldLayoutIdLst>
+  <p:transition spd="slow">
+    <p:fade/>
+  </p:transition>
   <p:txStyles>
     <p:titleStyle>
       <a:lvl1pPr algn="l" defTabSz="914400" rtl="0" eaLnBrk="1" latinLnBrk="0" hangingPunct="1">
@@ -3444,6 +3480,9 @@
   <p:clrMapOvr>
     <a:masterClrMapping/>
   </p:clrMapOvr>
+  <p:transition spd="slow">
+    <p:fade/>
+  </p:transition>
 </p:sld>
 </file>
 
@@ -3554,6 +3593,9 @@
   <p:clrMapOvr>
     <a:masterClrMapping/>
   </p:clrMapOvr>
+  <p:transition spd="slow">
+    <p:fade/>
+  </p:transition>
 </p:sld>
 </file>
 
@@ -3664,6 +3706,9 @@
   <p:clrMapOvr>
     <a:masterClrMapping/>
   </p:clrMapOvr>
+  <p:transition spd="slow">
+    <p:fade/>
+  </p:transition>
 </p:sld>
 </file>
 
@@ -3774,6 +3819,9 @@
   <p:clrMapOvr>
     <a:masterClrMapping/>
   </p:clrMapOvr>
+  <p:transition spd="slow">
+    <p:fade/>
+  </p:transition>
 </p:sld>
 </file>
 
@@ -3884,6 +3932,9 @@
   <p:clrMapOvr>
     <a:masterClrMapping/>
   </p:clrMapOvr>
+  <p:transition spd="slow">
+    <p:fade/>
+  </p:transition>
 </p:sld>
 </file>
 
@@ -4110,6 +4161,9 @@
   <p:clrMapOvr>
     <a:masterClrMapping/>
   </p:clrMapOvr>
+  <p:transition spd="slow">
+    <p:fade/>
+  </p:transition>
 </p:sld>
 </file>
 
@@ -4220,6 +4274,9 @@
   <p:clrMapOvr>
     <a:masterClrMapping/>
   </p:clrMapOvr>
+  <p:transition spd="slow">
+    <p:fade/>
+  </p:transition>
 </p:sld>
 </file>
 
@@ -4330,6 +4387,9 @@
   <p:clrMapOvr>
     <a:masterClrMapping/>
   </p:clrMapOvr>
+  <p:transition spd="slow">
+    <p:fade/>
+  </p:transition>
 </p:sld>
 </file>
 
@@ -4440,6 +4500,9 @@
   <p:clrMapOvr>
     <a:masterClrMapping/>
   </p:clrMapOvr>
+  <p:transition spd="slow">
+    <p:fade/>
+  </p:transition>
 </p:sld>
 </file>
 
@@ -4550,6 +4613,9 @@
   <p:clrMapOvr>
     <a:masterClrMapping/>
   </p:clrMapOvr>
+  <p:transition spd="slow">
+    <p:fade/>
+  </p:transition>
 </p:sld>
 </file>
 
@@ -4660,6 +4726,9 @@
   <p:clrMapOvr>
     <a:masterClrMapping/>
   </p:clrMapOvr>
+  <p:transition spd="slow">
+    <p:fade/>
+  </p:transition>
 </p:sld>
 </file>
 
@@ -4771,6 +4840,9 @@
   <p:clrMapOvr>
     <a:masterClrMapping/>
   </p:clrMapOvr>
+  <p:transition spd="slow">
+    <p:fade/>
+  </p:transition>
 </p:sld>
 </file>
 
@@ -4881,6 +4953,9 @@
   <p:clrMapOvr>
     <a:masterClrMapping/>
   </p:clrMapOvr>
+  <p:transition spd="slow">
+    <p:fade/>
+  </p:transition>
 </p:sld>
 </file>
 
